--- a/deliverables/帮扶管理系统介绍.pptx
+++ b/deliverables/帮扶管理系统介绍.pptx
@@ -23,6 +23,7 @@
     <p:sldId id="271" r:id="rId22"/>
     <p:sldId id="272" r:id="rId23"/>
     <p:sldId id="273" r:id="rId24"/>
+    <p:sldId id="274" r:id="rId25"/>
   </p:sldIdLst>
   <p:sldSz cx="12191695" cy="6858000" type="screen4x3"/>
   <p:notesSz cx="6858000" cy="9144000"/>
@@ -3352,7 +3353,7 @@
                 </a:solidFill>
                 <a:latin typeface="Microsoft YaHei"/>
               </a:rPr>
-              <a:t>v1.7.2  ｜  后端 12,109 测试通过 · 覆盖率 99.86%  ｜  前端 6,120 测试通过</a:t>
+              <a:t>v1.12.6  ｜  后端 12,109 测试通过 · 覆盖率 99.86%  ｜  前端 6,120 测试通过</a:t>
             </a:r>
           </a:p>
         </p:txBody>
@@ -10455,7 +10456,7 @@
                 </a:solidFill>
                 <a:latin typeface="Microsoft YaHei"/>
               </a:rPr>
-              <a:t>双击「帮扶管理系统 Setup 1.7.2.exe」，按向导安装（自动装好运行库）</a:t>
+              <a:t>双击「帮扶管理系统 Setup v1.12.6.exe」，按向导安装（自动装好运行库）</a:t>
             </a:r>
           </a:p>
         </p:txBody>
@@ -12097,7 +12098,7 @@
                 </a:solidFill>
                 <a:latin typeface="Microsoft YaHei"/>
               </a:rPr>
-              <a:t>帮扶管理信息系统 · v1.7.2 —— 让每一份帮扶台账都经得起审计</a:t>
+              <a:t>帮扶管理信息系统 · v1.12.6 —— 让每一份帮扶台账都经得起审计</a:t>
             </a:r>
           </a:p>
         </p:txBody>
@@ -12176,6 +12177,109 @@
                 <a:latin typeface="Microsoft YaHei"/>
               </a:rPr>
               <a:t>贵州省乡村振兴项目组  ·  2026-08</a:t>
+            </a:r>
+          </a:p>
+        </p:txBody>
+      </p:sp>
+    </p:spTree>
+  </p:cSld>
+  <p:clrMapOvr>
+    <a:masterClrMapping/>
+  </p:clrMapOvr>
+</p:sld>
+</file>
+
+<file path=ppt/slides/slide19.xml><?xml version="1.0" encoding="utf-8"?>
+<p:sld xmlns:a="http://schemas.openxmlformats.org/drawingml/2006/main" xmlns:p="http://schemas.openxmlformats.org/presentationml/2006/main" xmlns:r="http://schemas.openxmlformats.org/officeDocument/2006/relationships">
+  <p:cSld>
+    <p:spTree>
+      <p:nvGrpSpPr>
+        <p:cNvPr id="1" name=""/>
+        <p:cNvGrpSpPr/>
+        <p:nvPr/>
+      </p:nvGrpSpPr>
+      <p:grpSpPr/>
+      <p:sp>
+        <p:nvSpPr>
+          <p:cNvPr id="2" name="Title 1"/>
+          <p:cNvSpPr>
+            <a:spLocks noGrp="1"/>
+          </p:cNvSpPr>
+          <p:nvPr>
+            <p:ph type="title"/>
+          </p:nvPr>
+        </p:nvSpPr>
+        <p:spPr/>
+        <p:txBody>
+          <a:bodyPr/>
+          <a:lstStyle/>
+          <a:p>
+            <a:r>
+              <a:t>版本更新说明 · v1.12.6（2026-09-12）</a:t>
+            </a:r>
+          </a:p>
+        </p:txBody>
+      </p:sp>
+      <p:sp>
+        <p:nvSpPr>
+          <p:cNvPr id="3" name="Content Placeholder 2"/>
+          <p:cNvSpPr>
+            <a:spLocks noGrp="1"/>
+          </p:cNvSpPr>
+          <p:nvPr>
+            <p:ph idx="1"/>
+          </p:nvPr>
+        </p:nvSpPr>
+        <p:spPr/>
+        <p:txBody>
+          <a:bodyPr/>
+          <a:lstStyle/>
+          <a:p>
+            <a:pPr>
+              <a:defRPr sz="1600"/>
+            </a:pPr>
+            <a:r>
+              <a:t>• 遗留风险治理第一批：调度器 Timer 生命周期统一（可停止、无泄漏、分片清理接入调度）</a:t>
+            </a:r>
+          </a:p>
+          <a:p>
+            <a:pPr>
+              <a:defRPr sz="1600"/>
+            </a:pPr>
+            <a:r>
+              <a:t>• 启动期不再执行 VACUUM / 全库扫描，消除启动窗口 database is locked 抖动</a:t>
+            </a:r>
+          </a:p>
+          <a:p>
+            <a:pPr>
+              <a:defRPr sz="1600"/>
+            </a:pPr>
+            <a:r>
+              <a:t>• multipart 请求体分级预检（备份恢复 10GB，其余 512MB），防超大请求打爆内存</a:t>
+            </a:r>
+          </a:p>
+          <a:p>
+            <a:pPr>
+              <a:defRPr sz="1600"/>
+            </a:pPr>
+            <a:r>
+              <a:t>• 备份语义 fail-loud：一致性快照失败即中止，杜绝「陈旧但合法」的备份包</a:t>
+            </a:r>
+          </a:p>
+          <a:p>
+            <a:pPr>
+              <a:defRPr sz="1600"/>
+            </a:pPr>
+            <a:r>
+              <a:t>• 安全加固延续：目录穿越、存储型 XSS、Windows 文件占用、并发竞态（v1.12.5）</a:t>
+            </a:r>
+          </a:p>
+          <a:p>
+            <a:pPr>
+              <a:defRPr sz="1600"/>
+            </a:pPr>
+            <a:r>
+              <a:t>• 质量基线：后端 11089+ 用例 / 前端 302 文件全绿，双向覆盖率 100%</a:t>
             </a:r>
           </a:p>
         </p:txBody>
